--- a/粵語詩歌/你是彌賽亞——粵語.pptx
+++ b/粵語詩歌/你是彌賽亞——粵語.pptx
@@ -309,7 +309,7 @@
           <a:p>
             <a:fld id="{EA06B243-A6B0-454D-B20F-4E869BC5BFB2}" type="datetimeFigureOut">
               <a:rPr lang="zh-TW" altLang="en-US" smtClean="0"/>
-              <a:t>2025/8/9</a:t>
+              <a:t>2026/10/15</a:t>
             </a:fld>
             <a:endParaRPr lang="zh-TW" altLang="en-US"/>
           </a:p>
@@ -479,7 +479,7 @@
           <a:p>
             <a:fld id="{EA06B243-A6B0-454D-B20F-4E869BC5BFB2}" type="datetimeFigureOut">
               <a:rPr lang="zh-TW" altLang="en-US" smtClean="0"/>
-              <a:t>2025/8/9</a:t>
+              <a:t>2026/10/15</a:t>
             </a:fld>
             <a:endParaRPr lang="zh-TW" altLang="en-US"/>
           </a:p>
@@ -659,7 +659,7 @@
           <a:p>
             <a:fld id="{EA06B243-A6B0-454D-B20F-4E869BC5BFB2}" type="datetimeFigureOut">
               <a:rPr lang="zh-TW" altLang="en-US" smtClean="0"/>
-              <a:t>2025/8/9</a:t>
+              <a:t>2026/10/15</a:t>
             </a:fld>
             <a:endParaRPr lang="zh-TW" altLang="en-US"/>
           </a:p>
@@ -829,7 +829,7 @@
           <a:p>
             <a:fld id="{EA06B243-A6B0-454D-B20F-4E869BC5BFB2}" type="datetimeFigureOut">
               <a:rPr lang="zh-TW" altLang="en-US" smtClean="0"/>
-              <a:t>2025/8/9</a:t>
+              <a:t>2026/10/15</a:t>
             </a:fld>
             <a:endParaRPr lang="zh-TW" altLang="en-US"/>
           </a:p>
@@ -1075,7 +1075,7 @@
           <a:p>
             <a:fld id="{EA06B243-A6B0-454D-B20F-4E869BC5BFB2}" type="datetimeFigureOut">
               <a:rPr lang="zh-TW" altLang="en-US" smtClean="0"/>
-              <a:t>2025/8/9</a:t>
+              <a:t>2026/10/15</a:t>
             </a:fld>
             <a:endParaRPr lang="zh-TW" altLang="en-US"/>
           </a:p>
@@ -1363,7 +1363,7 @@
           <a:p>
             <a:fld id="{EA06B243-A6B0-454D-B20F-4E869BC5BFB2}" type="datetimeFigureOut">
               <a:rPr lang="zh-TW" altLang="en-US" smtClean="0"/>
-              <a:t>2025/8/9</a:t>
+              <a:t>2026/10/15</a:t>
             </a:fld>
             <a:endParaRPr lang="zh-TW" altLang="en-US"/>
           </a:p>
@@ -1785,7 +1785,7 @@
           <a:p>
             <a:fld id="{EA06B243-A6B0-454D-B20F-4E869BC5BFB2}" type="datetimeFigureOut">
               <a:rPr lang="zh-TW" altLang="en-US" smtClean="0"/>
-              <a:t>2025/8/9</a:t>
+              <a:t>2026/10/15</a:t>
             </a:fld>
             <a:endParaRPr lang="zh-TW" altLang="en-US"/>
           </a:p>
@@ -1903,7 +1903,7 @@
           <a:p>
             <a:fld id="{EA06B243-A6B0-454D-B20F-4E869BC5BFB2}" type="datetimeFigureOut">
               <a:rPr lang="zh-TW" altLang="en-US" smtClean="0"/>
-              <a:t>2025/8/9</a:t>
+              <a:t>2026/10/15</a:t>
             </a:fld>
             <a:endParaRPr lang="zh-TW" altLang="en-US"/>
           </a:p>
@@ -1998,7 +1998,7 @@
           <a:p>
             <a:fld id="{EA06B243-A6B0-454D-B20F-4E869BC5BFB2}" type="datetimeFigureOut">
               <a:rPr lang="zh-TW" altLang="en-US" smtClean="0"/>
-              <a:t>2025/8/9</a:t>
+              <a:t>2026/10/15</a:t>
             </a:fld>
             <a:endParaRPr lang="zh-TW" altLang="en-US"/>
           </a:p>
@@ -2275,7 +2275,7 @@
           <a:p>
             <a:fld id="{EA06B243-A6B0-454D-B20F-4E869BC5BFB2}" type="datetimeFigureOut">
               <a:rPr lang="zh-TW" altLang="en-US" smtClean="0"/>
-              <a:t>2025/8/9</a:t>
+              <a:t>2026/10/15</a:t>
             </a:fld>
             <a:endParaRPr lang="zh-TW" altLang="en-US"/>
           </a:p>
@@ -2532,7 +2532,7 @@
           <a:p>
             <a:fld id="{EA06B243-A6B0-454D-B20F-4E869BC5BFB2}" type="datetimeFigureOut">
               <a:rPr lang="zh-TW" altLang="en-US" smtClean="0"/>
-              <a:t>2025/8/9</a:t>
+              <a:t>2026/10/15</a:t>
             </a:fld>
             <a:endParaRPr lang="zh-TW" altLang="en-US"/>
           </a:p>
@@ -2748,7 +2748,7 @@
           <a:p>
             <a:fld id="{EA06B243-A6B0-454D-B20F-4E869BC5BFB2}" type="datetimeFigureOut">
               <a:rPr lang="zh-TW" altLang="en-US" smtClean="0"/>
-              <a:t>2025/8/9</a:t>
+              <a:t>2026/10/15</a:t>
             </a:fld>
             <a:endParaRPr lang="zh-TW" altLang="en-US"/>
           </a:p>
@@ -3410,7 +3410,7 @@
                 <a:latin typeface="微軟正黑體" pitchFamily="34" charset="-120"/>
                 <a:ea typeface="微軟正黑體" pitchFamily="34" charset="-120"/>
               </a:rPr>
-              <a:t>祢是彌賽亞我主我上帝</a:t>
+              <a:t>祢是彌賽亞  我主我上帝</a:t>
             </a:r>
           </a:p>
         </p:txBody>
@@ -3558,7 +3558,7 @@
                 <a:latin typeface="微軟正黑體" pitchFamily="34" charset="-120"/>
                 <a:ea typeface="微軟正黑體" pitchFamily="34" charset="-120"/>
               </a:rPr>
-              <a:t>神大能今彰顯恩典</a:t>
+              <a:t>神大能今彰顯</a:t>
             </a:r>
           </a:p>
           <a:p>
@@ -3573,7 +3573,7 @@
                 <a:latin typeface="微軟正黑體" pitchFamily="34" charset="-120"/>
                 <a:ea typeface="微軟正黑體" pitchFamily="34" charset="-120"/>
               </a:rPr>
-              <a:t>豐富深厚天天都可見</a:t>
+              <a:t>恩典豐富深厚  天天都可見</a:t>
             </a:r>
           </a:p>
         </p:txBody>
